--- a/Project Plan.pptx
+++ b/Project Plan.pptx
@@ -3491,9 +3491,14 @@
         </p:nvSpPr>
         <p:spPr/>
         <p:txBody>
-          <a:bodyPr/>
-          <a:lstStyle/>
-          <a:p>
+          <a:bodyPr>
+            <a:normAutofit lnSpcReduction="10000"/>
+          </a:bodyPr>
+          <a:lstStyle/>
+          <a:p>
+            <a:pPr marL="0" indent="0">
+              <a:buNone/>
+            </a:pPr>
             <a:r>
               <a:rPr lang="en-US" dirty="0"/>
               <a:t>Arc.js is a lightweight JavaScript framework designed specifically for single page web applications. </a:t>
@@ -3515,11 +3520,11 @@
             </a:br>
             <a:r>
               <a:rPr lang="en-GB" dirty="0"/>
-              <a:t>It should optimise how pages are handed to a user, regenerating content as the user “navigates” through a page, optimising the layout with a </a:t>
+              <a:t>It should optimise how pages are handed to a user by seamlessly regenerating content as the user “navigates” through a page, optimising the layout with a mobile-first design in mind. The framework also optimises the site for SEO, WGAC compliance and AI agent readability automatically. This takes a lot of work off of the developer allowing for a maintainable product, and makes the product </a:t>
             </a:r>
             <a:r>
               <a:rPr lang="en-GB"/>
-              <a:t>mobile-first design in mind.</a:t>
+              <a:t>more usable for the user.</a:t>
             </a:r>
             <a:endParaRPr lang="en-US" dirty="0"/>
           </a:p>

--- a/Project Plan.pptx
+++ b/Project Plan.pptx
@@ -7,6 +7,7 @@
   <p:sldIdLst>
     <p:sldId id="256" r:id="rId2"/>
     <p:sldId id="257" r:id="rId3"/>
+    <p:sldId id="258" r:id="rId4"/>
   </p:sldIdLst>
   <p:sldSz cx="12192000" cy="6858000"/>
   <p:notesSz cx="6858000" cy="9144000"/>
@@ -3500,8 +3501,12 @@
               <a:buNone/>
             </a:pPr>
             <a:r>
+              <a:rPr lang="en-US" b="1" dirty="0"/>
+              <a:t>Arc.js </a:t>
+            </a:r>
+            <a:r>
               <a:rPr lang="en-US" dirty="0"/>
-              <a:t>Arc.js is a lightweight JavaScript framework designed specifically for single page web applications. </a:t>
+              <a:t>is a lightweight JavaScript framework designed specifically for single page web applications. </a:t>
             </a:r>
           </a:p>
           <a:p>
@@ -3520,11 +3525,7 @@
             </a:br>
             <a:r>
               <a:rPr lang="en-GB" dirty="0"/>
-              <a:t>It should optimise how pages are handed to a user by seamlessly regenerating content as the user “navigates” through a page, optimising the layout with a mobile-first design in mind. The framework also optimises the site for SEO, WGAC compliance and AI agent readability automatically. This takes a lot of work off of the developer allowing for a maintainable product, and makes the product </a:t>
-            </a:r>
-            <a:r>
-              <a:rPr lang="en-GB"/>
-              <a:t>more usable for the user.</a:t>
+              <a:t>It should optimise how pages are handed to a user by seamlessly regenerating content as the user “navigates” through a page, optimising the layout with a mobile-first design in mind. The framework also optimises the site for SEO, WGAC compliance and AI agent readability automatically. This takes a lot of work off of the developer allowing for a maintainable product, and makes the product more usable for the user.</a:t>
             </a:r>
             <a:endParaRPr lang="en-US" dirty="0"/>
           </a:p>
@@ -3534,6 +3535,98 @@
     <p:extLst>
       <p:ext uri="{BB962C8B-B14F-4D97-AF65-F5344CB8AC3E}">
         <p14:creationId xmlns:p14="http://schemas.microsoft.com/office/powerpoint/2010/main" val="2685430722"/>
+      </p:ext>
+    </p:extLst>
+  </p:cSld>
+  <p:clrMapOvr>
+    <a:masterClrMapping/>
+  </p:clrMapOvr>
+</p:sld>
+</file>
+
+<file path=ppt/slides/slide3.xml><?xml version="1.0" encoding="utf-8"?>
+<p:sld xmlns:a="http://schemas.openxmlformats.org/drawingml/2006/main" xmlns:r="http://schemas.openxmlformats.org/officeDocument/2006/relationships" xmlns:p="http://schemas.openxmlformats.org/presentationml/2006/main">
+  <p:cSld>
+    <p:spTree>
+      <p:nvGrpSpPr>
+        <p:cNvPr id="1" name=""/>
+        <p:cNvGrpSpPr/>
+        <p:nvPr/>
+      </p:nvGrpSpPr>
+      <p:grpSpPr>
+        <a:xfrm>
+          <a:off x="0" y="0"/>
+          <a:ext cx="0" cy="0"/>
+          <a:chOff x="0" y="0"/>
+          <a:chExt cx="0" cy="0"/>
+        </a:xfrm>
+      </p:grpSpPr>
+      <p:sp>
+        <p:nvSpPr>
+          <p:cNvPr id="2" name="Title 1">
+            <a:extLst>
+              <a:ext uri="{FF2B5EF4-FFF2-40B4-BE49-F238E27FC236}">
+                <a16:creationId xmlns:a16="http://schemas.microsoft.com/office/drawing/2014/main" id="{BF169796-5650-2F0D-B7B6-205D7E02D52F}"/>
+              </a:ext>
+            </a:extLst>
+          </p:cNvPr>
+          <p:cNvSpPr>
+            <a:spLocks noGrp="1"/>
+          </p:cNvSpPr>
+          <p:nvPr>
+            <p:ph type="title"/>
+          </p:nvPr>
+        </p:nvSpPr>
+        <p:spPr/>
+        <p:txBody>
+          <a:bodyPr/>
+          <a:lstStyle/>
+          <a:p>
+            <a:r>
+              <a:rPr lang="en-US" dirty="0"/>
+              <a:t>Notes	</a:t>
+            </a:r>
+            <a:endParaRPr lang="en-GB" dirty="0"/>
+          </a:p>
+        </p:txBody>
+      </p:sp>
+      <p:sp>
+        <p:nvSpPr>
+          <p:cNvPr id="3" name="Content Placeholder 2">
+            <a:extLst>
+              <a:ext uri="{FF2B5EF4-FFF2-40B4-BE49-F238E27FC236}">
+                <a16:creationId xmlns:a16="http://schemas.microsoft.com/office/drawing/2014/main" id="{712B608A-D640-BCAA-D638-39D1E750CBE0}"/>
+              </a:ext>
+            </a:extLst>
+          </p:cNvPr>
+          <p:cNvSpPr>
+            <a:spLocks noGrp="1"/>
+          </p:cNvSpPr>
+          <p:nvPr>
+            <p:ph idx="1"/>
+          </p:nvPr>
+        </p:nvSpPr>
+        <p:spPr/>
+        <p:txBody>
+          <a:bodyPr/>
+          <a:lstStyle/>
+          <a:p>
+            <a:r>
+              <a:rPr lang="en-US" dirty="0"/>
+              <a:t>Have the framework translate to language preferences set by the customer</a:t>
+            </a:r>
+            <a:r>
+              <a:rPr lang="en-US"/>
+              <a:t>/their site viewers</a:t>
+            </a:r>
+            <a:endParaRPr lang="en-GB"/>
+          </a:p>
+        </p:txBody>
+      </p:sp>
+    </p:spTree>
+    <p:extLst>
+      <p:ext uri="{BB962C8B-B14F-4D97-AF65-F5344CB8AC3E}">
+        <p14:creationId xmlns:p14="http://schemas.microsoft.com/office/powerpoint/2010/main" val="3611380456"/>
       </p:ext>
     </p:extLst>
   </p:cSld>
